--- a/materialien/Welt4_Schluesselproblem/1_Praesentation/KR_W4_Praesentation_Stanford.pptx
+++ b/materialien/Welt4_Schluesselproblem/1_Praesentation/KR_W4_Praesentation_Stanford.pptx
@@ -134,7 +134,7 @@
   <p:extLst>
     <p:ext uri="{521415D9-36F7-43E2-AB2F-B90AF26B5E84}">
       <p14:sectionLst xmlns:p14="http://schemas.microsoft.com/office/powerpoint/2010/main">
-        <p14:section name="DS 12 · Das Schlüsselproblem" id="{0b767c1b-59f9-21ee-ef3e-045785ebc043}">
+        <p14:section name="DS 12 · Das Schlüsselproblem" id="{0f3df47b-0663-b809-9179-1f73d53e43d5}">
           <p14:sldIdLst>
             <p14:sldId id="256"/>
             <p14:sldId id="257"/>
@@ -148,7 +148,7 @@
             <p14:sldId id="265"/>
           </p14:sldIdLst>
         </p14:section>
-        <p14:section name="DS 12 · Diffie-Hellman (Ergänzung)" id="{19027951-5c51-881a-b1f7-57ecdb4a124e}">
+        <p14:section name="DS 12 · Diffie-Hellman (Ergänzung)" id="{11430400-bf38-991b-4b58-2646e8f43d63}">
           <p14:sldIdLst>
             <p14:sldId id="266"/>
             <p14:sldId id="267"/>
@@ -159,7 +159,7 @@
             <p14:sldId id="272"/>
           </p14:sldIdLst>
         </p14:section>
-        <p14:section name="DS 13 · RSA und Hybrid" id="{e20798bd-e62c-55bd-4fcf-fad1368dde5a}">
+        <p14:section name="DS 13 · RSA und Hybrid" id="{af803531-0e21-b3fa-c7da-cf87d77a8430}">
           <p14:sldIdLst>
             <p14:sldId id="273"/>
             <p14:sldId id="274"/>

--- a/materialien/Welt4_Schluesselproblem/1_Praesentation/KR_W4_Praesentation_Stanford.pptx
+++ b/materialien/Welt4_Schluesselproblem/1_Praesentation/KR_W4_Praesentation_Stanford.pptx
@@ -134,7 +134,7 @@
   <p:extLst>
     <p:ext uri="{521415D9-36F7-43E2-AB2F-B90AF26B5E84}">
       <p14:sectionLst xmlns:p14="http://schemas.microsoft.com/office/powerpoint/2010/main">
-        <p14:section name="DS 12 · Das Schlüsselproblem" id="{0f3df47b-0663-b809-9179-1f73d53e43d5}">
+        <p14:section name="DS 12 · Das Schlüsselproblem" id="{fc831c71-dc33-cf70-464f-bec830cd2c35}">
           <p14:sldIdLst>
             <p14:sldId id="256"/>
             <p14:sldId id="257"/>
@@ -148,7 +148,7 @@
             <p14:sldId id="265"/>
           </p14:sldIdLst>
         </p14:section>
-        <p14:section name="DS 12 · Diffie-Hellman (Ergänzung)" id="{11430400-bf38-991b-4b58-2646e8f43d63}">
+        <p14:section name="DS 12 · Diffie-Hellman (Ergänzung)" id="{91f5973c-6279-79a4-df4a-e8d4bd5bbe27}">
           <p14:sldIdLst>
             <p14:sldId id="266"/>
             <p14:sldId id="267"/>
@@ -159,7 +159,7 @@
             <p14:sldId id="272"/>
           </p14:sldIdLst>
         </p14:section>
-        <p14:section name="DS 13 · RSA und Hybrid" id="{af803531-0e21-b3fa-c7da-cf87d77a8430}">
+        <p14:section name="DS 13 · RSA und Hybrid" id="{8cad900d-0aa2-cab0-71f0-78ff9363a2e9}">
           <p14:sldIdLst>
             <p14:sldId id="273"/>
             <p14:sldId id="274"/>
@@ -1560,7 +1560,7 @@
           <a:p>
             <a:r>
               <a:rPr lang="en-US" dirty="0"/>
-              <a:t>10 min. Archivfund-Text vorlesen: „Das Chronoskop setzt euch in einem Rechnerraum der Stanford University ab. Es ist 1976 … Auf einem Schreibtisch liegt ein Fernschreiben einer Bank an ihre Filiale. Darüber klebt ein Zettel: ‚Notverfahren – nur Verschiebung, weil der neue Schlüssel nicht angekommen ist.‘ … Zwei Forscher an dieser Universität behaupten, man könne einen gemeinsamen Schlüssel vereinbaren, während Eve jedes Wort mithört. Knackt zuerst das Fernschreiben – und findet dann heraus, wie das gehen soll.“
+              <a:t>10 min. Archivfund-Text vorlesen: „Das Chronoskop setzt euch in einem Rechnerraum der Stanford University ab. Es ist 1976 … Auf einem Schreibtisch liegt ein Fernschreiben einer Bank an ihre Filiale. Darüber klebt ein Zettel: ‚Notverfahren – nur Verschiebung.‘ … Zwei Forscher an dieser Universität behaupten, man könne einen gemeinsamen Schlüssel vereinbaren, während Eve jedes Wort mithört. Knackt zuerst das Fernschreiben – und findet dann heraus, wie das gehen soll.“
 PA mit Chiffrierscheibe. Tipp für Langsame: häufigster Buchstabe N (6×) → e? (N = 14, e = 5 → k = 9). Probe: aus T (20) wird mit −9 k (11).
 Erwartet: „kurier kam nie an, schlüssel verloren“ (kurierkamnieanschluesselverloren).
 Impuls: „Warum ‚Notverfahren‘? Was wäre gewesen, wenn der Kurier angekommen wäre – und wenn Eve ihn abgefangen hätte?“
@@ -14086,7 +14086,7 @@
                 <a:ea typeface="Georgia" pitchFamily="34" charset="-122"/>
                 <a:cs typeface="Georgia" pitchFamily="34" charset="-120"/>
               </a:rPr>
-              <a:t>Der Brief mit dem verlorenen Schlüssel</a:t>
+              <a:t>Das Fernschreiben der Bank</a:t>
             </a:r>
             <a:endParaRPr lang="en-US" sz="3000" dirty="0"/>
           </a:p>

--- a/materialien/Welt4_Schluesselproblem/1_Praesentation/KR_W4_Praesentation_Stanford.pptx
+++ b/materialien/Welt4_Schluesselproblem/1_Praesentation/KR_W4_Praesentation_Stanford.pptx
@@ -134,7 +134,7 @@
   <p:extLst>
     <p:ext uri="{521415D9-36F7-43E2-AB2F-B90AF26B5E84}">
       <p14:sectionLst xmlns:p14="http://schemas.microsoft.com/office/powerpoint/2010/main">
-        <p14:section name="DS 12 · Das Schlüsselproblem" id="{fc831c71-dc33-cf70-464f-bec830cd2c35}">
+        <p14:section name="DS 12 · Das Schlüsselproblem" id="{822b80e2-2c80-ccfa-62d0-500a4fc3f3bc}">
           <p14:sldIdLst>
             <p14:sldId id="256"/>
             <p14:sldId id="257"/>
@@ -148,7 +148,7 @@
             <p14:sldId id="265"/>
           </p14:sldIdLst>
         </p14:section>
-        <p14:section name="DS 12 · Diffie-Hellman (Ergänzung)" id="{91f5973c-6279-79a4-df4a-e8d4bd5bbe27}">
+        <p14:section name="DS 12 · Diffie-Hellman (Ergänzung)" id="{98461337-43be-b455-97ce-b57f930420f5}">
           <p14:sldIdLst>
             <p14:sldId id="266"/>
             <p14:sldId id="267"/>
@@ -159,7 +159,7 @@
             <p14:sldId id="272"/>
           </p14:sldIdLst>
         </p14:section>
-        <p14:section name="DS 13 · RSA und Hybrid" id="{8cad900d-0aa2-cab0-71f0-78ff9363a2e9}">
+        <p14:section name="DS 13 · RSA und Hybrid" id="{bbf23296-93be-e2eb-7a06-4ce5551521e7}">
           <p14:sldIdLst>
             <p14:sldId id="273"/>
             <p14:sldId id="274"/>
@@ -1472,7 +1472,7 @@
           <a:p>
             <a:r>
               <a:rPr lang="en-US" dirty="0"/>
-              <a:t>10 min (Folie in der Spezifikation als „Folie 3 analog“ vorgesehen). Lösungen: WU-W4-01 → 15 / 12; WU-W4-06 → A = 2, B = 4, K = 2; WU-W4-12 → symmetrisch 45 (Halbierung vergessen), asymmetrisch 20 (10 Schlüsselpaare).</a:t>
+              <a:t>10 min (Folie in der Spezifikation als „Folie 3 analog“ vorgesehen). Lösungen: WU-W4-01 → 91 / 28; WU-W4-06 → A = 9, B = 27, K = 16; WU-W4-12 → symmetrisch 231 (Halbierung vergessen), asymmetrisch 44 (22 Schlüsselpaare).</a:t>
             </a:r>
             <a:endParaRPr lang="en-US" dirty="0"/>
           </a:p>
@@ -2454,7 +2454,7 @@
           <a:p>
             <a:r>
               <a:rPr lang="en-US" dirty="0"/>
-              <a:t>10 min, davon 3 min Besprechung. Lösungen: WU-W4-02 → 1101 0101; WU-W4-03 → w = 23, ((23 + 7 − 1) mod 26) + 1 = 4 → D; WU-W4-09 → 9 (3 · 9 = 27 = 26 + 1).
+              <a:t>10 min, davon 3 min Besprechung. Lösungen: WU-W4-02 → 1010 1001; WU-W4-03 → w = 23, ((23 + 7 − 1) mod 26) + 1 = 4 → D; WU-W4-09 → 7 (3 · 7 = 21 = 20 + 1).
 Falle P2 betonen: mod = kleinster nicht negativer Rest, Überlauf über Z. Das Inverse brauchen wir heute für Eves Angriffe auf fremde Tauschverfahren.</a:t>
             </a:r>
             <a:endParaRPr lang="en-US" dirty="0"/>
@@ -13649,7 +13649,7 @@
                           <a:ea typeface="Calibri" pitchFamily="34" charset="-122"/>
                           <a:cs typeface="Calibri" pitchFamily="34" charset="-120"/>
                         </a:rPr>
-                        <a:t>Sechs Personen: Schlüssel symmetrisch? asymmetrisch?</a:t>
+                        <a:t>Vierzehn Personen: Schlüssel symmetrisch? asymmetrisch?</a:t>
                       </a:r>
                       <a:endParaRPr lang="en-US" sz="2000" dirty="0">
                         <a:latin typeface="Calibri" charset="0"/>
@@ -13787,7 +13787,7 @@
                           <a:ea typeface="Calibri" pitchFamily="34" charset="-122"/>
                           <a:cs typeface="Calibri" pitchFamily="34" charset="-120"/>
                         </a:rPr>
-                        <a:t>DH im Kleinformat: p = 7, g = 3, a = 2, b = 4 → A, B, K</a:t>
+                        <a:t>DH im Kleinformat: p = 31, g = 3, a = 2, b = 3 → A, B, K</a:t>
                       </a:r>
                       <a:endParaRPr lang="en-US" sz="2000" dirty="0">
                         <a:latin typeface="Calibri" charset="0"/>
@@ -13925,7 +13925,7 @@
                           <a:ea typeface="Calibri" pitchFamily="34" charset="-122"/>
                           <a:cs typeface="Calibri" pitchFamily="34" charset="-120"/>
                         </a:rPr>
-                        <a:t>Falle P7: „Zehn Teilnehmende: 90 bzw. 10 Schlüssel“</a:t>
+                        <a:t>Falle P7: „22 Teilnehmende: 462 bzw. 22 Schlüssel“</a:t>
                       </a:r>
                       <a:endParaRPr lang="en-US" sz="2000" dirty="0">
                         <a:latin typeface="Calibri" charset="0"/>
@@ -21372,7 +21372,7 @@
                           <a:ea typeface="Consolas" pitchFamily="34" charset="-122"/>
                           <a:cs typeface="Consolas" pitchFamily="34" charset="-120"/>
                         </a:rPr>
-                        <a:t>1011 0110</a:t>
+                        <a:t>1110 0010</a:t>
                       </a:r>
                       <a:r>
                         <a:rPr lang="en-US" sz="2000" dirty="0">
@@ -21394,7 +21394,7 @@
                           <a:ea typeface="Consolas" pitchFamily="34" charset="-122"/>
                           <a:cs typeface="Consolas" pitchFamily="34" charset="-120"/>
                         </a:rPr>
-                        <a:t>0110 0011</a:t>
+                        <a:t>0100 1011</a:t>
                       </a:r>
                       <a:r>
                         <a:rPr lang="en-US" sz="2000" dirty="0">
@@ -21681,7 +21681,7 @@
                           <a:ea typeface="Calibri" pitchFamily="34" charset="-122"/>
                           <a:cs typeface="Calibri" pitchFamily="34" charset="-120"/>
                         </a:rPr>
-                        <a:t>Inverses (W1): 3 · ? mod 26 = 1</a:t>
+                        <a:t>Inverses (W1): 3 · ? mod 20 = 1</a:t>
                       </a:r>
                       <a:endParaRPr lang="en-US" sz="2000" dirty="0">
                         <a:latin typeface="Calibri" charset="0"/>
